--- a/docs/pptx/carbo/ritu-carbo-adjcif-anemia2.pptx
+++ b/docs/pptx/carbo/ritu-carbo-adjcif-anemia2.pptx
@@ -2271,7 +2271,7 @@
           </p:nvSpPr>
           <p:spPr>
             <a:xfrm>
-              <a:off x="910695" y="5061174"/>
+              <a:off x="910695" y="5054919"/>
               <a:ext cx="7706515" cy="0"/>
             </a:xfrm>
             <a:custGeom>
@@ -2314,7 +2314,7 @@
           </p:nvSpPr>
           <p:spPr>
             <a:xfrm>
-              <a:off x="910695" y="4022679"/>
+              <a:off x="910695" y="4003914"/>
               <a:ext cx="7706515" cy="0"/>
             </a:xfrm>
             <a:custGeom>
@@ -2357,7 +2357,7 @@
           </p:nvSpPr>
           <p:spPr>
             <a:xfrm>
-              <a:off x="910695" y="2984184"/>
+              <a:off x="910695" y="2952909"/>
               <a:ext cx="7706515" cy="0"/>
             </a:xfrm>
             <a:custGeom>
@@ -2615,7 +2615,7 @@
           </p:nvSpPr>
           <p:spPr>
             <a:xfrm>
-              <a:off x="910695" y="4541927"/>
+              <a:off x="910695" y="4529417"/>
               <a:ext cx="7706515" cy="0"/>
             </a:xfrm>
             <a:custGeom>
@@ -2658,7 +2658,7 @@
           </p:nvSpPr>
           <p:spPr>
             <a:xfrm>
-              <a:off x="910695" y="3503432"/>
+              <a:off x="910695" y="3478411"/>
               <a:ext cx="7706515" cy="0"/>
             </a:xfrm>
             <a:custGeom>
@@ -2830,276 +2830,276 @@
           </p:nvSpPr>
           <p:spPr>
             <a:xfrm>
-              <a:off x="1260991" y="3577792"/>
-              <a:ext cx="7005923" cy="1979129"/>
+              <a:off x="1260991" y="3560613"/>
+              <a:ext cx="7005923" cy="1995658"/>
             </a:xfrm>
             <a:custGeom>
               <a:avLst/>
               <a:pathLst>
-                <a:path w="7005923" h="1979129">
+                <a:path w="7005923" h="1995658">
                   <a:moveTo>
-                    <a:pt x="0" y="1979129"/>
+                    <a:pt x="0" y="1995658"/>
                   </a:moveTo>
                   <a:lnTo>
-                    <a:pt x="88682" y="1979129"/>
-                  </a:lnTo>
-                  <a:lnTo>
-                    <a:pt x="88682" y="1953619"/>
-                  </a:lnTo>
-                  <a:lnTo>
-                    <a:pt x="177365" y="1953619"/>
-                  </a:lnTo>
-                  <a:lnTo>
-                    <a:pt x="177365" y="1927122"/>
-                  </a:lnTo>
-                  <a:lnTo>
-                    <a:pt x="354730" y="1927122"/>
-                  </a:lnTo>
-                  <a:lnTo>
-                    <a:pt x="354730" y="1900214"/>
-                  </a:lnTo>
-                  <a:lnTo>
-                    <a:pt x="443412" y="1900214"/>
-                  </a:lnTo>
-                  <a:lnTo>
-                    <a:pt x="443412" y="1874522"/>
-                  </a:lnTo>
-                  <a:lnTo>
-                    <a:pt x="620778" y="1874522"/>
-                  </a:lnTo>
-                  <a:lnTo>
-                    <a:pt x="620778" y="1826249"/>
-                  </a:lnTo>
-                  <a:lnTo>
-                    <a:pt x="709460" y="1826249"/>
-                  </a:lnTo>
-                  <a:lnTo>
-                    <a:pt x="709460" y="1801757"/>
-                  </a:lnTo>
-                  <a:lnTo>
-                    <a:pt x="798143" y="1801757"/>
-                  </a:lnTo>
-                  <a:lnTo>
-                    <a:pt x="798143" y="1755304"/>
-                  </a:lnTo>
-                  <a:lnTo>
-                    <a:pt x="975508" y="1755304"/>
-                  </a:lnTo>
-                  <a:lnTo>
-                    <a:pt x="975508" y="1729081"/>
-                  </a:lnTo>
-                  <a:lnTo>
-                    <a:pt x="1152873" y="1729081"/>
-                  </a:lnTo>
-                  <a:lnTo>
-                    <a:pt x="1152873" y="1679114"/>
-                  </a:lnTo>
-                  <a:lnTo>
-                    <a:pt x="1241556" y="1679114"/>
-                  </a:lnTo>
-                  <a:lnTo>
-                    <a:pt x="1241556" y="1584917"/>
-                  </a:lnTo>
-                  <a:lnTo>
-                    <a:pt x="1330238" y="1584917"/>
-                  </a:lnTo>
-                  <a:lnTo>
-                    <a:pt x="1330238" y="1558340"/>
-                  </a:lnTo>
-                  <a:lnTo>
-                    <a:pt x="1862334" y="1558340"/>
-                  </a:lnTo>
-                  <a:lnTo>
-                    <a:pt x="1862334" y="1456847"/>
-                  </a:lnTo>
-                  <a:lnTo>
-                    <a:pt x="2128381" y="1456847"/>
-                  </a:lnTo>
-                  <a:lnTo>
-                    <a:pt x="2128381" y="1427961"/>
-                  </a:lnTo>
-                  <a:lnTo>
-                    <a:pt x="2217064" y="1427961"/>
-                  </a:lnTo>
-                  <a:lnTo>
-                    <a:pt x="2217064" y="1399260"/>
-                  </a:lnTo>
-                  <a:lnTo>
-                    <a:pt x="2394429" y="1399260"/>
-                  </a:lnTo>
-                  <a:lnTo>
-                    <a:pt x="2394429" y="1371236"/>
-                  </a:lnTo>
-                  <a:lnTo>
-                    <a:pt x="2483112" y="1371236"/>
-                  </a:lnTo>
-                  <a:lnTo>
-                    <a:pt x="2483112" y="1290540"/>
-                  </a:lnTo>
-                  <a:lnTo>
-                    <a:pt x="2660477" y="1290540"/>
-                  </a:lnTo>
-                  <a:lnTo>
-                    <a:pt x="2660477" y="1264037"/>
-                  </a:lnTo>
-                  <a:lnTo>
-                    <a:pt x="3103890" y="1264037"/>
-                  </a:lnTo>
-                  <a:lnTo>
-                    <a:pt x="3103890" y="1070159"/>
-                  </a:lnTo>
-                  <a:lnTo>
-                    <a:pt x="3192572" y="1070159"/>
-                  </a:lnTo>
-                  <a:lnTo>
-                    <a:pt x="3192572" y="1021386"/>
-                  </a:lnTo>
-                  <a:lnTo>
-                    <a:pt x="3281255" y="1021386"/>
-                  </a:lnTo>
-                  <a:lnTo>
-                    <a:pt x="3281255" y="996300"/>
-                  </a:lnTo>
-                  <a:lnTo>
-                    <a:pt x="3369937" y="996300"/>
-                  </a:lnTo>
-                  <a:lnTo>
-                    <a:pt x="3369937" y="971162"/>
-                  </a:lnTo>
-                  <a:lnTo>
-                    <a:pt x="3458620" y="971162"/>
-                  </a:lnTo>
-                  <a:lnTo>
-                    <a:pt x="3458620" y="945812"/>
-                  </a:lnTo>
-                  <a:lnTo>
-                    <a:pt x="3547302" y="945812"/>
-                  </a:lnTo>
-                  <a:lnTo>
-                    <a:pt x="3547302" y="895532"/>
-                  </a:lnTo>
-                  <a:lnTo>
-                    <a:pt x="3724668" y="895532"/>
-                  </a:lnTo>
-                  <a:lnTo>
-                    <a:pt x="3724668" y="869063"/>
-                  </a:lnTo>
-                  <a:lnTo>
-                    <a:pt x="3813350" y="869063"/>
-                  </a:lnTo>
-                  <a:lnTo>
-                    <a:pt x="3813350" y="841807"/>
-                  </a:lnTo>
-                  <a:lnTo>
-                    <a:pt x="3990715" y="841807"/>
-                  </a:lnTo>
-                  <a:lnTo>
-                    <a:pt x="3990715" y="785538"/>
-                  </a:lnTo>
-                  <a:lnTo>
-                    <a:pt x="4434128" y="785538"/>
-                  </a:lnTo>
-                  <a:lnTo>
-                    <a:pt x="4434128" y="756985"/>
-                  </a:lnTo>
-                  <a:lnTo>
-                    <a:pt x="4611493" y="756985"/>
-                  </a:lnTo>
-                  <a:lnTo>
-                    <a:pt x="4611493" y="728744"/>
-                  </a:lnTo>
-                  <a:lnTo>
-                    <a:pt x="4700176" y="728744"/>
-                  </a:lnTo>
-                  <a:lnTo>
-                    <a:pt x="4700176" y="673465"/>
-                  </a:lnTo>
-                  <a:lnTo>
-                    <a:pt x="4788859" y="673465"/>
-                  </a:lnTo>
-                  <a:lnTo>
-                    <a:pt x="4788859" y="646085"/>
-                  </a:lnTo>
-                  <a:lnTo>
-                    <a:pt x="4966224" y="646085"/>
-                  </a:lnTo>
-                  <a:lnTo>
-                    <a:pt x="4966224" y="565350"/>
-                  </a:lnTo>
-                  <a:lnTo>
-                    <a:pt x="5143589" y="565350"/>
-                  </a:lnTo>
-                  <a:lnTo>
-                    <a:pt x="5143589" y="537921"/>
-                  </a:lnTo>
-                  <a:lnTo>
-                    <a:pt x="5764367" y="537921"/>
-                  </a:lnTo>
-                  <a:lnTo>
-                    <a:pt x="5764367" y="510930"/>
-                  </a:lnTo>
-                  <a:lnTo>
-                    <a:pt x="5941732" y="510930"/>
-                  </a:lnTo>
-                  <a:lnTo>
-                    <a:pt x="5941732" y="484337"/>
-                  </a:lnTo>
-                  <a:lnTo>
-                    <a:pt x="6030415" y="484337"/>
-                  </a:lnTo>
-                  <a:lnTo>
-                    <a:pt x="6030415" y="458153"/>
-                  </a:lnTo>
-                  <a:lnTo>
-                    <a:pt x="6119097" y="458153"/>
-                  </a:lnTo>
-                  <a:lnTo>
-                    <a:pt x="6119097" y="407044"/>
-                  </a:lnTo>
-                  <a:lnTo>
-                    <a:pt x="6207780" y="407044"/>
-                  </a:lnTo>
-                  <a:lnTo>
-                    <a:pt x="6207780" y="356864"/>
-                  </a:lnTo>
-                  <a:lnTo>
-                    <a:pt x="6473827" y="356864"/>
-                  </a:lnTo>
-                  <a:lnTo>
-                    <a:pt x="6473827" y="331473"/>
-                  </a:lnTo>
-                  <a:lnTo>
-                    <a:pt x="6562510" y="331473"/>
-                  </a:lnTo>
-                  <a:lnTo>
-                    <a:pt x="6562510" y="281221"/>
-                  </a:lnTo>
-                  <a:lnTo>
-                    <a:pt x="6651193" y="281221"/>
-                  </a:lnTo>
-                  <a:lnTo>
-                    <a:pt x="6651193" y="256510"/>
-                  </a:lnTo>
-                  <a:lnTo>
-                    <a:pt x="6739875" y="256510"/>
-                  </a:lnTo>
-                  <a:lnTo>
-                    <a:pt x="6739875" y="208199"/>
-                  </a:lnTo>
-                  <a:lnTo>
-                    <a:pt x="6828558" y="208199"/>
-                  </a:lnTo>
-                  <a:lnTo>
-                    <a:pt x="6828558" y="93071"/>
-                  </a:lnTo>
-                  <a:lnTo>
-                    <a:pt x="6917240" y="93071"/>
-                  </a:lnTo>
-                  <a:lnTo>
-                    <a:pt x="6917240" y="46572"/>
-                  </a:lnTo>
-                  <a:lnTo>
-                    <a:pt x="7005923" y="46572"/>
+                    <a:pt x="88682" y="1995658"/>
+                  </a:lnTo>
+                  <a:lnTo>
+                    <a:pt x="88682" y="1969518"/>
+                  </a:lnTo>
+                  <a:lnTo>
+                    <a:pt x="177365" y="1969518"/>
+                  </a:lnTo>
+                  <a:lnTo>
+                    <a:pt x="177365" y="1942232"/>
+                  </a:lnTo>
+                  <a:lnTo>
+                    <a:pt x="354730" y="1942232"/>
+                  </a:lnTo>
+                  <a:lnTo>
+                    <a:pt x="354730" y="1914574"/>
+                  </a:lnTo>
+                  <a:lnTo>
+                    <a:pt x="443412" y="1914574"/>
+                  </a:lnTo>
+                  <a:lnTo>
+                    <a:pt x="443412" y="1888160"/>
+                  </a:lnTo>
+                  <a:lnTo>
+                    <a:pt x="620778" y="1888160"/>
+                  </a:lnTo>
+                  <a:lnTo>
+                    <a:pt x="620778" y="1838511"/>
+                  </a:lnTo>
+                  <a:lnTo>
+                    <a:pt x="709460" y="1838511"/>
+                  </a:lnTo>
+                  <a:lnTo>
+                    <a:pt x="709460" y="1813388"/>
+                  </a:lnTo>
+                  <a:lnTo>
+                    <a:pt x="798143" y="1813388"/>
+                  </a:lnTo>
+                  <a:lnTo>
+                    <a:pt x="798143" y="1765695"/>
+                  </a:lnTo>
+                  <a:lnTo>
+                    <a:pt x="975508" y="1765695"/>
+                  </a:lnTo>
+                  <a:lnTo>
+                    <a:pt x="975508" y="1738755"/>
+                  </a:lnTo>
+                  <a:lnTo>
+                    <a:pt x="1152873" y="1738755"/>
+                  </a:lnTo>
+                  <a:lnTo>
+                    <a:pt x="1152873" y="1687379"/>
+                  </a:lnTo>
+                  <a:lnTo>
+                    <a:pt x="1241556" y="1687379"/>
+                  </a:lnTo>
+                  <a:lnTo>
+                    <a:pt x="1241556" y="1590167"/>
+                  </a:lnTo>
+                  <a:lnTo>
+                    <a:pt x="1330238" y="1590167"/>
+                  </a:lnTo>
+                  <a:lnTo>
+                    <a:pt x="1330238" y="1562789"/>
+                  </a:lnTo>
+                  <a:lnTo>
+                    <a:pt x="1862334" y="1562789"/>
+                  </a:lnTo>
+                  <a:lnTo>
+                    <a:pt x="1862334" y="1458363"/>
+                  </a:lnTo>
+                  <a:lnTo>
+                    <a:pt x="2128381" y="1458363"/>
+                  </a:lnTo>
+                  <a:lnTo>
+                    <a:pt x="2128381" y="1428965"/>
+                  </a:lnTo>
+                  <a:lnTo>
+                    <a:pt x="2217064" y="1428965"/>
+                  </a:lnTo>
+                  <a:lnTo>
+                    <a:pt x="2217064" y="1399728"/>
+                  </a:lnTo>
+                  <a:lnTo>
+                    <a:pt x="2394429" y="1399728"/>
+                  </a:lnTo>
+                  <a:lnTo>
+                    <a:pt x="2394429" y="1371168"/>
+                  </a:lnTo>
+                  <a:lnTo>
+                    <a:pt x="2483112" y="1371168"/>
+                  </a:lnTo>
+                  <a:lnTo>
+                    <a:pt x="2483112" y="1315659"/>
+                  </a:lnTo>
+                  <a:lnTo>
+                    <a:pt x="2660477" y="1315659"/>
+                  </a:lnTo>
+                  <a:lnTo>
+                    <a:pt x="2660477" y="1288703"/>
+                  </a:lnTo>
+                  <a:lnTo>
+                    <a:pt x="3103890" y="1288703"/>
+                  </a:lnTo>
+                  <a:lnTo>
+                    <a:pt x="3103890" y="1091613"/>
+                  </a:lnTo>
+                  <a:lnTo>
+                    <a:pt x="3192572" y="1091613"/>
+                  </a:lnTo>
+                  <a:lnTo>
+                    <a:pt x="3192572" y="1041852"/>
+                  </a:lnTo>
+                  <a:lnTo>
+                    <a:pt x="3281255" y="1041852"/>
+                  </a:lnTo>
+                  <a:lnTo>
+                    <a:pt x="3281255" y="1016193"/>
+                  </a:lnTo>
+                  <a:lnTo>
+                    <a:pt x="3369937" y="1016193"/>
+                  </a:lnTo>
+                  <a:lnTo>
+                    <a:pt x="3369937" y="990494"/>
+                  </a:lnTo>
+                  <a:lnTo>
+                    <a:pt x="3458620" y="990494"/>
+                  </a:lnTo>
+                  <a:lnTo>
+                    <a:pt x="3458620" y="964593"/>
+                  </a:lnTo>
+                  <a:lnTo>
+                    <a:pt x="3547302" y="964593"/>
+                  </a:lnTo>
+                  <a:lnTo>
+                    <a:pt x="3547302" y="913205"/>
+                  </a:lnTo>
+                  <a:lnTo>
+                    <a:pt x="3724668" y="913205"/>
+                  </a:lnTo>
+                  <a:lnTo>
+                    <a:pt x="3724668" y="886141"/>
+                  </a:lnTo>
+                  <a:lnTo>
+                    <a:pt x="3813350" y="886141"/>
+                  </a:lnTo>
+                  <a:lnTo>
+                    <a:pt x="3813350" y="858286"/>
+                  </a:lnTo>
+                  <a:lnTo>
+                    <a:pt x="3990715" y="858286"/>
+                  </a:lnTo>
+                  <a:lnTo>
+                    <a:pt x="3990715" y="800883"/>
+                  </a:lnTo>
+                  <a:lnTo>
+                    <a:pt x="4434128" y="800883"/>
+                  </a:lnTo>
+                  <a:lnTo>
+                    <a:pt x="4434128" y="771799"/>
+                  </a:lnTo>
+                  <a:lnTo>
+                    <a:pt x="4611493" y="771799"/>
+                  </a:lnTo>
+                  <a:lnTo>
+                    <a:pt x="4611493" y="743053"/>
+                  </a:lnTo>
+                  <a:lnTo>
+                    <a:pt x="4700176" y="743053"/>
+                  </a:lnTo>
+                  <a:lnTo>
+                    <a:pt x="4700176" y="686842"/>
+                  </a:lnTo>
+                  <a:lnTo>
+                    <a:pt x="4788859" y="686842"/>
+                  </a:lnTo>
+                  <a:lnTo>
+                    <a:pt x="4788859" y="658972"/>
+                  </a:lnTo>
+                  <a:lnTo>
+                    <a:pt x="4966224" y="658972"/>
+                  </a:lnTo>
+                  <a:lnTo>
+                    <a:pt x="4966224" y="576762"/>
+                  </a:lnTo>
+                  <a:lnTo>
+                    <a:pt x="5143589" y="576762"/>
+                  </a:lnTo>
+                  <a:lnTo>
+                    <a:pt x="5143589" y="548777"/>
+                  </a:lnTo>
+                  <a:lnTo>
+                    <a:pt x="5764367" y="548777"/>
+                  </a:lnTo>
+                  <a:lnTo>
+                    <a:pt x="5764367" y="521242"/>
+                  </a:lnTo>
+                  <a:lnTo>
+                    <a:pt x="5941732" y="521242"/>
+                  </a:lnTo>
+                  <a:lnTo>
+                    <a:pt x="5941732" y="494109"/>
+                  </a:lnTo>
+                  <a:lnTo>
+                    <a:pt x="6030415" y="494109"/>
+                  </a:lnTo>
+                  <a:lnTo>
+                    <a:pt x="6030415" y="467398"/>
+                  </a:lnTo>
+                  <a:lnTo>
+                    <a:pt x="6119097" y="467398"/>
+                  </a:lnTo>
+                  <a:lnTo>
+                    <a:pt x="6119097" y="415267"/>
+                  </a:lnTo>
+                  <a:lnTo>
+                    <a:pt x="6207780" y="415267"/>
+                  </a:lnTo>
+                  <a:lnTo>
+                    <a:pt x="6207780" y="364104"/>
+                  </a:lnTo>
+                  <a:lnTo>
+                    <a:pt x="6473827" y="364104"/>
+                  </a:lnTo>
+                  <a:lnTo>
+                    <a:pt x="6473827" y="338193"/>
+                  </a:lnTo>
+                  <a:lnTo>
+                    <a:pt x="6562510" y="338193"/>
+                  </a:lnTo>
+                  <a:lnTo>
+                    <a:pt x="6562510" y="286903"/>
+                  </a:lnTo>
+                  <a:lnTo>
+                    <a:pt x="6651193" y="286903"/>
+                  </a:lnTo>
+                  <a:lnTo>
+                    <a:pt x="6651193" y="261684"/>
+                  </a:lnTo>
+                  <a:lnTo>
+                    <a:pt x="6739875" y="261684"/>
+                  </a:lnTo>
+                  <a:lnTo>
+                    <a:pt x="6739875" y="212385"/>
+                  </a:lnTo>
+                  <a:lnTo>
+                    <a:pt x="6828558" y="212385"/>
+                  </a:lnTo>
+                  <a:lnTo>
+                    <a:pt x="6828558" y="94962"/>
+                  </a:lnTo>
+                  <a:lnTo>
+                    <a:pt x="6917240" y="94962"/>
+                  </a:lnTo>
+                  <a:lnTo>
+                    <a:pt x="6917240" y="47502"/>
+                  </a:lnTo>
+                  <a:lnTo>
+                    <a:pt x="7005923" y="47502"/>
                   </a:lnTo>
                   <a:lnTo>
                     <a:pt x="7005923" y="0"/>
@@ -3132,275 +3132,275 @@
           <p:spPr>
             <a:xfrm>
               <a:off x="1260991" y="2861938"/>
-              <a:ext cx="7005923" cy="2674871"/>
+              <a:ext cx="7005923" cy="2674594"/>
             </a:xfrm>
             <a:custGeom>
               <a:avLst/>
               <a:pathLst>
-                <a:path w="7005923" h="2674871">
+                <a:path w="7005923" h="2674594">
                   <a:moveTo>
-                    <a:pt x="0" y="2674871"/>
+                    <a:pt x="0" y="2674594"/>
                   </a:moveTo>
                   <a:lnTo>
-                    <a:pt x="88682" y="2674871"/>
-                  </a:lnTo>
-                  <a:lnTo>
-                    <a:pt x="88682" y="2629366"/>
-                  </a:lnTo>
-                  <a:lnTo>
-                    <a:pt x="177365" y="2629366"/>
-                  </a:lnTo>
-                  <a:lnTo>
-                    <a:pt x="177365" y="2583835"/>
-                  </a:lnTo>
-                  <a:lnTo>
-                    <a:pt x="354730" y="2583835"/>
-                  </a:lnTo>
-                  <a:lnTo>
-                    <a:pt x="354730" y="2539113"/>
-                  </a:lnTo>
-                  <a:lnTo>
-                    <a:pt x="443412" y="2539113"/>
-                  </a:lnTo>
-                  <a:lnTo>
-                    <a:pt x="443412" y="2497578"/>
-                  </a:lnTo>
-                  <a:lnTo>
-                    <a:pt x="620778" y="2497578"/>
-                  </a:lnTo>
-                  <a:lnTo>
-                    <a:pt x="620778" y="2421867"/>
-                  </a:lnTo>
-                  <a:lnTo>
-                    <a:pt x="709460" y="2421867"/>
-                  </a:lnTo>
-                  <a:lnTo>
-                    <a:pt x="709460" y="2384300"/>
-                  </a:lnTo>
-                  <a:lnTo>
-                    <a:pt x="798143" y="2384300"/>
-                  </a:lnTo>
-                  <a:lnTo>
-                    <a:pt x="798143" y="2314062"/>
-                  </a:lnTo>
-                  <a:lnTo>
-                    <a:pt x="975508" y="2314062"/>
-                  </a:lnTo>
-                  <a:lnTo>
-                    <a:pt x="975508" y="2274805"/>
-                  </a:lnTo>
-                  <a:lnTo>
-                    <a:pt x="1152873" y="2274805"/>
-                  </a:lnTo>
-                  <a:lnTo>
-                    <a:pt x="1152873" y="2200463"/>
-                  </a:lnTo>
-                  <a:lnTo>
-                    <a:pt x="1241556" y="2200463"/>
-                  </a:lnTo>
-                  <a:lnTo>
-                    <a:pt x="1241556" y="2061198"/>
-                  </a:lnTo>
-                  <a:lnTo>
-                    <a:pt x="1330238" y="2061198"/>
-                  </a:lnTo>
-                  <a:lnTo>
-                    <a:pt x="1330238" y="2022062"/>
-                  </a:lnTo>
-                  <a:lnTo>
-                    <a:pt x="1862334" y="2022062"/>
-                  </a:lnTo>
-                  <a:lnTo>
-                    <a:pt x="1862334" y="1873391"/>
-                  </a:lnTo>
-                  <a:lnTo>
-                    <a:pt x="2128381" y="1873391"/>
-                  </a:lnTo>
-                  <a:lnTo>
-                    <a:pt x="2128381" y="1831363"/>
-                  </a:lnTo>
-                  <a:lnTo>
-                    <a:pt x="2217064" y="1831363"/>
-                  </a:lnTo>
-                  <a:lnTo>
-                    <a:pt x="2217064" y="1789754"/>
-                  </a:lnTo>
-                  <a:lnTo>
-                    <a:pt x="2394429" y="1789754"/>
-                  </a:lnTo>
-                  <a:lnTo>
-                    <a:pt x="2394429" y="1749279"/>
-                  </a:lnTo>
-                  <a:lnTo>
-                    <a:pt x="2483112" y="1749279"/>
-                  </a:lnTo>
-                  <a:lnTo>
-                    <a:pt x="2483112" y="1633654"/>
-                  </a:lnTo>
-                  <a:lnTo>
-                    <a:pt x="2660477" y="1633654"/>
-                  </a:lnTo>
-                  <a:lnTo>
-                    <a:pt x="2660477" y="1595998"/>
-                  </a:lnTo>
-                  <a:lnTo>
-                    <a:pt x="3103890" y="1595998"/>
-                  </a:lnTo>
-                  <a:lnTo>
-                    <a:pt x="3103890" y="1325675"/>
-                  </a:lnTo>
-                  <a:lnTo>
-                    <a:pt x="3192572" y="1325675"/>
-                  </a:lnTo>
-                  <a:lnTo>
-                    <a:pt x="3192572" y="1259144"/>
-                  </a:lnTo>
-                  <a:lnTo>
-                    <a:pt x="3281255" y="1259144"/>
-                  </a:lnTo>
-                  <a:lnTo>
-                    <a:pt x="3281255" y="1225159"/>
-                  </a:lnTo>
-                  <a:lnTo>
-                    <a:pt x="3369937" y="1225159"/>
-                  </a:lnTo>
-                  <a:lnTo>
-                    <a:pt x="3369937" y="1191263"/>
-                  </a:lnTo>
-                  <a:lnTo>
-                    <a:pt x="3458620" y="1191263"/>
-                  </a:lnTo>
-                  <a:lnTo>
-                    <a:pt x="3458620" y="1157241"/>
-                  </a:lnTo>
-                  <a:lnTo>
-                    <a:pt x="3547302" y="1157241"/>
-                  </a:lnTo>
-                  <a:lnTo>
-                    <a:pt x="3547302" y="1090244"/>
-                  </a:lnTo>
-                  <a:lnTo>
-                    <a:pt x="3724668" y="1090244"/>
-                  </a:lnTo>
-                  <a:lnTo>
-                    <a:pt x="3724668" y="1055228"/>
-                  </a:lnTo>
-                  <a:lnTo>
-                    <a:pt x="3813350" y="1055228"/>
-                  </a:lnTo>
-                  <a:lnTo>
-                    <a:pt x="3813350" y="1019356"/>
-                  </a:lnTo>
-                  <a:lnTo>
-                    <a:pt x="3990715" y="1019356"/>
-                  </a:lnTo>
-                  <a:lnTo>
-                    <a:pt x="3990715" y="945885"/>
-                  </a:lnTo>
-                  <a:lnTo>
-                    <a:pt x="4434128" y="945885"/>
-                  </a:lnTo>
-                  <a:lnTo>
-                    <a:pt x="4434128" y="908905"/>
-                  </a:lnTo>
-                  <a:lnTo>
-                    <a:pt x="4611493" y="908905"/>
-                  </a:lnTo>
-                  <a:lnTo>
-                    <a:pt x="4611493" y="872524"/>
-                  </a:lnTo>
-                  <a:lnTo>
-                    <a:pt x="4700176" y="872524"/>
-                  </a:lnTo>
-                  <a:lnTo>
-                    <a:pt x="4700176" y="801882"/>
-                  </a:lnTo>
-                  <a:lnTo>
-                    <a:pt x="4788859" y="801882"/>
-                  </a:lnTo>
-                  <a:lnTo>
-                    <a:pt x="4788859" y="767169"/>
-                  </a:lnTo>
-                  <a:lnTo>
-                    <a:pt x="4966224" y="767169"/>
-                  </a:lnTo>
-                  <a:lnTo>
-                    <a:pt x="4966224" y="665870"/>
-                  </a:lnTo>
-                  <a:lnTo>
-                    <a:pt x="5143589" y="665870"/>
-                  </a:lnTo>
-                  <a:lnTo>
-                    <a:pt x="5143589" y="631810"/>
-                  </a:lnTo>
-                  <a:lnTo>
-                    <a:pt x="5764367" y="631810"/>
-                  </a:lnTo>
-                  <a:lnTo>
-                    <a:pt x="5764367" y="598473"/>
-                  </a:lnTo>
-                  <a:lnTo>
-                    <a:pt x="5941732" y="598473"/>
-                  </a:lnTo>
-                  <a:lnTo>
-                    <a:pt x="5941732" y="565797"/>
-                  </a:lnTo>
-                  <a:lnTo>
-                    <a:pt x="6030415" y="565797"/>
-                  </a:lnTo>
-                  <a:lnTo>
-                    <a:pt x="6030415" y="533787"/>
-                  </a:lnTo>
-                  <a:lnTo>
-                    <a:pt x="6119097" y="533787"/>
-                  </a:lnTo>
-                  <a:lnTo>
-                    <a:pt x="6119097" y="471779"/>
-                  </a:lnTo>
-                  <a:lnTo>
-                    <a:pt x="6207780" y="471779"/>
-                  </a:lnTo>
-                  <a:lnTo>
-                    <a:pt x="6207780" y="411502"/>
-                  </a:lnTo>
-                  <a:lnTo>
-                    <a:pt x="6473827" y="411502"/>
-                  </a:lnTo>
-                  <a:lnTo>
-                    <a:pt x="6473827" y="381230"/>
-                  </a:lnTo>
-                  <a:lnTo>
-                    <a:pt x="6562510" y="381230"/>
-                  </a:lnTo>
-                  <a:lnTo>
-                    <a:pt x="6562510" y="321766"/>
-                  </a:lnTo>
-                  <a:lnTo>
-                    <a:pt x="6651193" y="321766"/>
-                  </a:lnTo>
-                  <a:lnTo>
-                    <a:pt x="6651193" y="292744"/>
-                  </a:lnTo>
-                  <a:lnTo>
-                    <a:pt x="6739875" y="292744"/>
-                  </a:lnTo>
-                  <a:lnTo>
-                    <a:pt x="6739875" y="236421"/>
-                  </a:lnTo>
-                  <a:lnTo>
-                    <a:pt x="6828558" y="236421"/>
-                  </a:lnTo>
-                  <a:lnTo>
-                    <a:pt x="6828558" y="104424"/>
-                  </a:lnTo>
-                  <a:lnTo>
-                    <a:pt x="6917240" y="104424"/>
-                  </a:lnTo>
-                  <a:lnTo>
-                    <a:pt x="6917240" y="51998"/>
-                  </a:lnTo>
-                  <a:lnTo>
-                    <a:pt x="7005923" y="51998"/>
+                    <a:pt x="88682" y="2674594"/>
+                  </a:lnTo>
+                  <a:lnTo>
+                    <a:pt x="88682" y="2628842"/>
+                  </a:lnTo>
+                  <a:lnTo>
+                    <a:pt x="177365" y="2628842"/>
+                  </a:lnTo>
+                  <a:lnTo>
+                    <a:pt x="177365" y="2582763"/>
+                  </a:lnTo>
+                  <a:lnTo>
+                    <a:pt x="354730" y="2582763"/>
+                  </a:lnTo>
+                  <a:lnTo>
+                    <a:pt x="354730" y="2537530"/>
+                  </a:lnTo>
+                  <a:lnTo>
+                    <a:pt x="443412" y="2537530"/>
+                  </a:lnTo>
+                  <a:lnTo>
+                    <a:pt x="443412" y="2495474"/>
+                  </a:lnTo>
+                  <a:lnTo>
+                    <a:pt x="620778" y="2495474"/>
+                  </a:lnTo>
+                  <a:lnTo>
+                    <a:pt x="620778" y="2418721"/>
+                  </a:lnTo>
+                  <a:lnTo>
+                    <a:pt x="709460" y="2418721"/>
+                  </a:lnTo>
+                  <a:lnTo>
+                    <a:pt x="709460" y="2380721"/>
+                  </a:lnTo>
+                  <a:lnTo>
+                    <a:pt x="798143" y="2380721"/>
+                  </a:lnTo>
+                  <a:lnTo>
+                    <a:pt x="798143" y="2309593"/>
+                  </a:lnTo>
+                  <a:lnTo>
+                    <a:pt x="975508" y="2309593"/>
+                  </a:lnTo>
+                  <a:lnTo>
+                    <a:pt x="975508" y="2269806"/>
+                  </a:lnTo>
+                  <a:lnTo>
+                    <a:pt x="1152873" y="2269806"/>
+                  </a:lnTo>
+                  <a:lnTo>
+                    <a:pt x="1152873" y="2194384"/>
+                  </a:lnTo>
+                  <a:lnTo>
+                    <a:pt x="1241556" y="2194384"/>
+                  </a:lnTo>
+                  <a:lnTo>
+                    <a:pt x="1241556" y="2052504"/>
+                  </a:lnTo>
+                  <a:lnTo>
+                    <a:pt x="1330238" y="2052504"/>
+                  </a:lnTo>
+                  <a:lnTo>
+                    <a:pt x="1330238" y="2012688"/>
+                  </a:lnTo>
+                  <a:lnTo>
+                    <a:pt x="1862334" y="2012688"/>
+                  </a:lnTo>
+                  <a:lnTo>
+                    <a:pt x="1862334" y="1861566"/>
+                  </a:lnTo>
+                  <a:lnTo>
+                    <a:pt x="2128381" y="1861566"/>
+                  </a:lnTo>
+                  <a:lnTo>
+                    <a:pt x="2128381" y="1819299"/>
+                  </a:lnTo>
+                  <a:lnTo>
+                    <a:pt x="2217064" y="1819299"/>
+                  </a:lnTo>
+                  <a:lnTo>
+                    <a:pt x="2217064" y="1777410"/>
+                  </a:lnTo>
+                  <a:lnTo>
+                    <a:pt x="2394429" y="1777410"/>
+                  </a:lnTo>
+                  <a:lnTo>
+                    <a:pt x="2394429" y="1736642"/>
+                  </a:lnTo>
+                  <a:lnTo>
+                    <a:pt x="2483112" y="1736642"/>
+                  </a:lnTo>
+                  <a:lnTo>
+                    <a:pt x="2483112" y="1657872"/>
+                  </a:lnTo>
+                  <a:lnTo>
+                    <a:pt x="2660477" y="1657872"/>
+                  </a:lnTo>
+                  <a:lnTo>
+                    <a:pt x="2660477" y="1619853"/>
+                  </a:lnTo>
+                  <a:lnTo>
+                    <a:pt x="3103890" y="1619853"/>
+                  </a:lnTo>
+                  <a:lnTo>
+                    <a:pt x="3103890" y="1346950"/>
+                  </a:lnTo>
+                  <a:lnTo>
+                    <a:pt x="3192572" y="1346950"/>
+                  </a:lnTo>
+                  <a:lnTo>
+                    <a:pt x="3192572" y="1279515"/>
+                  </a:lnTo>
+                  <a:lnTo>
+                    <a:pt x="3281255" y="1279515"/>
+                  </a:lnTo>
+                  <a:lnTo>
+                    <a:pt x="3281255" y="1244977"/>
+                  </a:lnTo>
+                  <a:lnTo>
+                    <a:pt x="3369937" y="1244977"/>
+                  </a:lnTo>
+                  <a:lnTo>
+                    <a:pt x="3369937" y="1210546"/>
+                  </a:lnTo>
+                  <a:lnTo>
+                    <a:pt x="3458620" y="1210546"/>
+                  </a:lnTo>
+                  <a:lnTo>
+                    <a:pt x="3458620" y="1176007"/>
+                  </a:lnTo>
+                  <a:lnTo>
+                    <a:pt x="3547302" y="1176007"/>
+                  </a:lnTo>
+                  <a:lnTo>
+                    <a:pt x="3547302" y="1107962"/>
+                  </a:lnTo>
+                  <a:lnTo>
+                    <a:pt x="3724668" y="1107962"/>
+                  </a:lnTo>
+                  <a:lnTo>
+                    <a:pt x="3724668" y="1072380"/>
+                  </a:lnTo>
+                  <a:lnTo>
+                    <a:pt x="3813350" y="1072380"/>
+                  </a:lnTo>
+                  <a:lnTo>
+                    <a:pt x="3813350" y="1035944"/>
+                  </a:lnTo>
+                  <a:lnTo>
+                    <a:pt x="3990715" y="1035944"/>
+                  </a:lnTo>
+                  <a:lnTo>
+                    <a:pt x="3990715" y="961440"/>
+                  </a:lnTo>
+                  <a:lnTo>
+                    <a:pt x="4434128" y="961440"/>
+                  </a:lnTo>
+                  <a:lnTo>
+                    <a:pt x="4434128" y="923988"/>
+                  </a:lnTo>
+                  <a:lnTo>
+                    <a:pt x="4611493" y="923988"/>
+                  </a:lnTo>
+                  <a:lnTo>
+                    <a:pt x="4611493" y="887168"/>
+                  </a:lnTo>
+                  <a:lnTo>
+                    <a:pt x="4700176" y="887168"/>
+                  </a:lnTo>
+                  <a:lnTo>
+                    <a:pt x="4700176" y="815725"/>
+                  </a:lnTo>
+                  <a:lnTo>
+                    <a:pt x="4788859" y="815725"/>
+                  </a:lnTo>
+                  <a:lnTo>
+                    <a:pt x="4788859" y="780573"/>
+                  </a:lnTo>
+                  <a:lnTo>
+                    <a:pt x="4966224" y="780573"/>
+                  </a:lnTo>
+                  <a:lnTo>
+                    <a:pt x="4966224" y="677918"/>
+                  </a:lnTo>
+                  <a:lnTo>
+                    <a:pt x="5143589" y="677918"/>
+                  </a:lnTo>
+                  <a:lnTo>
+                    <a:pt x="5143589" y="643324"/>
+                  </a:lnTo>
+                  <a:lnTo>
+                    <a:pt x="5764367" y="643324"/>
+                  </a:lnTo>
+                  <a:lnTo>
+                    <a:pt x="5764367" y="609456"/>
+                  </a:lnTo>
+                  <a:lnTo>
+                    <a:pt x="5941732" y="609456"/>
+                  </a:lnTo>
+                  <a:lnTo>
+                    <a:pt x="5941732" y="576250"/>
+                  </a:lnTo>
+                  <a:lnTo>
+                    <a:pt x="6030415" y="576250"/>
+                  </a:lnTo>
+                  <a:lnTo>
+                    <a:pt x="6030415" y="543720"/>
+                  </a:lnTo>
+                  <a:lnTo>
+                    <a:pt x="6119097" y="543720"/>
+                  </a:lnTo>
+                  <a:lnTo>
+                    <a:pt x="6119097" y="480689"/>
+                  </a:lnTo>
+                  <a:lnTo>
+                    <a:pt x="6207780" y="480689"/>
+                  </a:lnTo>
+                  <a:lnTo>
+                    <a:pt x="6207780" y="419414"/>
+                  </a:lnTo>
+                  <a:lnTo>
+                    <a:pt x="6473827" y="419414"/>
+                  </a:lnTo>
+                  <a:lnTo>
+                    <a:pt x="6473827" y="388603"/>
+                  </a:lnTo>
+                  <a:lnTo>
+                    <a:pt x="6562510" y="388603"/>
+                  </a:lnTo>
+                  <a:lnTo>
+                    <a:pt x="6562510" y="328048"/>
+                  </a:lnTo>
+                  <a:lnTo>
+                    <a:pt x="6651193" y="328048"/>
+                  </a:lnTo>
+                  <a:lnTo>
+                    <a:pt x="6651193" y="298485"/>
+                  </a:lnTo>
+                  <a:lnTo>
+                    <a:pt x="6739875" y="298485"/>
+                  </a:lnTo>
+                  <a:lnTo>
+                    <a:pt x="6739875" y="241101"/>
+                  </a:lnTo>
+                  <a:lnTo>
+                    <a:pt x="6828558" y="241101"/>
+                  </a:lnTo>
+                  <a:lnTo>
+                    <a:pt x="6828558" y="106571"/>
+                  </a:lnTo>
+                  <a:lnTo>
+                    <a:pt x="6917240" y="106571"/>
+                  </a:lnTo>
+                  <a:lnTo>
+                    <a:pt x="6917240" y="53060"/>
+                  </a:lnTo>
+                  <a:lnTo>
+                    <a:pt x="7005923" y="53060"/>
                   </a:lnTo>
                   <a:lnTo>
                     <a:pt x="7005923" y="0"/>
@@ -3478,7 +3478,7 @@
           </p:nvSpPr>
           <p:spPr>
             <a:xfrm>
-              <a:off x="692708" y="4501876"/>
+              <a:off x="692708" y="4489366"/>
               <a:ext cx="155356" cy="80101"/>
             </a:xfrm>
             <a:prstGeom prst="rect">
@@ -3524,7 +3524,7 @@
           </p:nvSpPr>
           <p:spPr>
             <a:xfrm>
-              <a:off x="692708" y="3463381"/>
+              <a:off x="692708" y="3438361"/>
               <a:ext cx="155356" cy="80101"/>
             </a:xfrm>
             <a:prstGeom prst="rect">
@@ -4005,7 +4005,7 @@
                   <a:latin typeface="Helvetica"/>
                   <a:cs typeface="Helvetica"/>
                 </a:rPr>
-                <a:t>Discrep &gt;= +25 vs &lt;+25: subHR = 1.89 (95% CI 1.00-3.58), p = 0.049</a:t>
+                <a:t>Discrep &gt;= +25 vs &lt;+25: subHR = 1.85 (95% CI 0.98-3.51), p = 0.059</a:t>
               </a:r>
             </a:p>
           </p:txBody>
